--- a/outputs/ophthalmology-batch-20261011/ok_fitting/A6_color_editable.pptx
+++ b/outputs/ophthalmology-batch-20261011/ok_fitting/A6_color_editable.pptx
@@ -519,7 +519,7 @@
           <a:p/>
           <a:p>
             <a:r>
-              <a:t>ok_fitting-02 明确数值禁忌：8岁以下儿童；角膜内皮细胞密度少于2 000个/mm²，为原文禁忌证。</a:t>
+              <a:t>ok_fitting-02 明确数值禁忌：8岁以下儿童（原文表述，8岁整的边界未单独说明）；角膜内皮细胞密度少于2 000个/mm²，为原文禁忌证。</a:t>
             </a:r>
           </a:p>
           <a:p>
@@ -3977,7 +3977,7 @@
         <p:spPr>
           <a:xfrm>
             <a:off x="172720" y="744220"/>
-            <a:ext cx="3434560" cy="716280"/>
+            <a:ext cx="3434560" cy="863600"/>
           </a:xfrm>
           <a:prstGeom prst="rect">
             <a:avLst/>
@@ -4062,14 +4062,14 @@
       </p:sp>
       <p:sp>
         <p:nvSpPr>
-          <p:cNvPr id="7" name="按镜片注册范围；角膜曲率39.00～48.00 D；卫生、理解及依从性良好。禁忌：&lt;8岁，内皮密度&lt;"/>
+          <p:cNvPr id="7" name="按镜片注册范围；角膜曲率39.00～48.00 D；卫生、理解及依从性良好。禁忌：8岁以下（原文表述"/>
           <p:cNvSpPr txBox="1"/>
           <p:nvPr/>
         </p:nvSpPr>
         <p:spPr>
           <a:xfrm>
             <a:off x="274320" y="934719"/>
-            <a:ext cx="3231360" cy="358140"/>
+            <a:ext cx="3231360" cy="505459"/>
           </a:xfrm>
           <a:prstGeom prst="rect">
             <a:avLst/>
@@ -4126,7 +4126,31 @@
                 <a:ea typeface="Microsoft YaHei"/>
                 <a:cs typeface="Microsoft YaHei"/>
               </a:rPr>
-              <a:t>依从性良好。禁忌：&lt;8岁，内皮密度&lt;2 000个/mm²。</a:t>
+              <a:t>依从性良好。禁忌：8岁以下（原文表述），内皮密度&lt;2 000</a:t>
+            </a:r>
+          </a:p>
+          <a:p>
+            <a:pPr>
+              <a:lnSpc>
+                <a:spcPts val="1160"/>
+              </a:lnSpc>
+              <a:spcBef>
+                <a:spcPts val="0"/>
+              </a:spcBef>
+              <a:spcAft>
+                <a:spcPts val="0"/>
+              </a:spcAft>
+            </a:pPr>
+            <a:r>
+              <a:rPr sz="950" b="0" lang="zh-CN">
+                <a:solidFill>
+                  <a:srgbClr val="1E2E3B"/>
+                </a:solidFill>
+                <a:latin typeface="Microsoft YaHei"/>
+                <a:ea typeface="Microsoft YaHei"/>
+                <a:cs typeface="Microsoft YaHei"/>
+              </a:rPr>
+              <a:t>个/mm²。</a:t>
             </a:r>
           </a:p>
         </p:txBody>
@@ -4139,7 +4163,7 @@
         </p:nvSpPr>
         <p:spPr>
           <a:xfrm>
-            <a:off x="274320" y="1254760"/>
+            <a:off x="274320" y="1402080"/>
             <a:ext cx="3231360" cy="193040"/>
           </a:xfrm>
           <a:prstGeom prst="rect">
@@ -4186,7 +4210,7 @@
         </p:nvSpPr>
         <p:spPr>
           <a:xfrm>
-            <a:off x="172720" y="1511300"/>
+            <a:off x="172720" y="1658620"/>
             <a:ext cx="3434560" cy="863600"/>
           </a:xfrm>
           <a:prstGeom prst="rect">
@@ -4231,7 +4255,7 @@
         </p:nvSpPr>
         <p:spPr>
           <a:xfrm>
-            <a:off x="274320" y="1549400"/>
+            <a:off x="274320" y="1696720"/>
             <a:ext cx="3231360" cy="215900"/>
           </a:xfrm>
           <a:prstGeom prst="rect">
@@ -4278,7 +4302,7 @@
         </p:nvSpPr>
         <p:spPr>
           <a:xfrm>
-            <a:off x="274320" y="1701800"/>
+            <a:off x="274320" y="1849120"/>
             <a:ext cx="3231360" cy="505459"/>
           </a:xfrm>
           <a:prstGeom prst="rect">
@@ -4373,7 +4397,7 @@
         </p:nvSpPr>
         <p:spPr>
           <a:xfrm>
-            <a:off x="274320" y="2169160"/>
+            <a:off x="274320" y="2316479"/>
             <a:ext cx="3231360" cy="193040"/>
           </a:xfrm>
           <a:prstGeom prst="rect">
@@ -4420,7 +4444,7 @@
         </p:nvSpPr>
         <p:spPr>
           <a:xfrm>
-            <a:off x="172720" y="2425700"/>
+            <a:off x="172720" y="2573020"/>
             <a:ext cx="3434560" cy="716280"/>
           </a:xfrm>
           <a:prstGeom prst="rect">
@@ -4465,7 +4489,7 @@
         </p:nvSpPr>
         <p:spPr>
           <a:xfrm>
-            <a:off x="274320" y="2463800"/>
+            <a:off x="274320" y="2611120"/>
             <a:ext cx="3231360" cy="215900"/>
           </a:xfrm>
           <a:prstGeom prst="rect">
@@ -4512,7 +4536,7 @@
         </p:nvSpPr>
         <p:spPr>
           <a:xfrm>
-            <a:off x="274320" y="2616200"/>
+            <a:off x="274320" y="2763520"/>
             <a:ext cx="3231360" cy="358140"/>
           </a:xfrm>
           <a:prstGeom prst="rect">
@@ -4583,7 +4607,7 @@
         </p:nvSpPr>
         <p:spPr>
           <a:xfrm>
-            <a:off x="274320" y="2936240"/>
+            <a:off x="274320" y="3083560"/>
             <a:ext cx="3231360" cy="193040"/>
           </a:xfrm>
           <a:prstGeom prst="rect">
@@ -4630,7 +4654,7 @@
         </p:nvSpPr>
         <p:spPr>
           <a:xfrm>
-            <a:off x="172720" y="3192780"/>
+            <a:off x="172720" y="3340100"/>
             <a:ext cx="3434560" cy="716280"/>
           </a:xfrm>
           <a:prstGeom prst="rect">
@@ -4675,7 +4699,7 @@
         </p:nvSpPr>
         <p:spPr>
           <a:xfrm>
-            <a:off x="274320" y="3230880"/>
+            <a:off x="274320" y="3378200"/>
             <a:ext cx="3231360" cy="215900"/>
           </a:xfrm>
           <a:prstGeom prst="rect">
@@ -4722,7 +4746,7 @@
         </p:nvSpPr>
         <p:spPr>
           <a:xfrm>
-            <a:off x="274320" y="3383279"/>
+            <a:off x="274320" y="3530600"/>
             <a:ext cx="3231360" cy="358140"/>
           </a:xfrm>
           <a:prstGeom prst="rect">
@@ -4793,7 +4817,7 @@
         </p:nvSpPr>
         <p:spPr>
           <a:xfrm>
-            <a:off x="274320" y="3703319"/>
+            <a:off x="274320" y="3850640"/>
             <a:ext cx="3231360" cy="193040"/>
           </a:xfrm>
           <a:prstGeom prst="rect">
